--- a/TEMPLATE-slides.pptx
+++ b/TEMPLATE-slides.pptx
@@ -7,7 +7,6 @@
   <p:sldIdLst>
     <p:sldId id="274" r:id="rId2"/>
     <p:sldId id="280" r:id="rId3"/>
-    <p:sldId id="279" r:id="rId4"/>
   </p:sldIdLst>
   <p:sldSz cx="9144000" cy="6858000" type="screen4x3"/>
   <p:notesSz cx="6858000" cy="9144000"/>
@@ -245,7 +244,7 @@
           <a:p>
             <a:fld id="{E759A0DE-F190-5444-87AC-4719D5F20D15}" type="datetimeFigureOut">
               <a:rPr lang="en-US" smtClean="0"/>
-              <a:t>6/19/26</a:t>
+              <a:t>8/8/26</a:t>
             </a:fld>
             <a:endParaRPr lang="en-US"/>
           </a:p>
@@ -415,7 +414,7 @@
           <a:p>
             <a:fld id="{E759A0DE-F190-5444-87AC-4719D5F20D15}" type="datetimeFigureOut">
               <a:rPr lang="en-US" smtClean="0"/>
-              <a:t>6/19/26</a:t>
+              <a:t>8/8/26</a:t>
             </a:fld>
             <a:endParaRPr lang="en-US"/>
           </a:p>
@@ -595,7 +594,7 @@
           <a:p>
             <a:fld id="{E759A0DE-F190-5444-87AC-4719D5F20D15}" type="datetimeFigureOut">
               <a:rPr lang="en-US" smtClean="0"/>
-              <a:t>6/19/26</a:t>
+              <a:t>8/8/26</a:t>
             </a:fld>
             <a:endParaRPr lang="en-US"/>
           </a:p>
@@ -765,7 +764,7 @@
           <a:p>
             <a:fld id="{E759A0DE-F190-5444-87AC-4719D5F20D15}" type="datetimeFigureOut">
               <a:rPr lang="en-US" smtClean="0"/>
-              <a:t>6/19/26</a:t>
+              <a:t>8/8/26</a:t>
             </a:fld>
             <a:endParaRPr lang="en-US"/>
           </a:p>
@@ -1011,7 +1010,7 @@
           <a:p>
             <a:fld id="{E759A0DE-F190-5444-87AC-4719D5F20D15}" type="datetimeFigureOut">
               <a:rPr lang="en-US" smtClean="0"/>
-              <a:t>6/19/26</a:t>
+              <a:t>8/8/26</a:t>
             </a:fld>
             <a:endParaRPr lang="en-US"/>
           </a:p>
@@ -1243,7 +1242,7 @@
           <a:p>
             <a:fld id="{E759A0DE-F190-5444-87AC-4719D5F20D15}" type="datetimeFigureOut">
               <a:rPr lang="en-US" smtClean="0"/>
-              <a:t>6/19/26</a:t>
+              <a:t>8/8/26</a:t>
             </a:fld>
             <a:endParaRPr lang="en-US"/>
           </a:p>
@@ -1610,7 +1609,7 @@
           <a:p>
             <a:fld id="{E759A0DE-F190-5444-87AC-4719D5F20D15}" type="datetimeFigureOut">
               <a:rPr lang="en-US" smtClean="0"/>
-              <a:t>6/19/26</a:t>
+              <a:t>8/8/26</a:t>
             </a:fld>
             <a:endParaRPr lang="en-US"/>
           </a:p>
@@ -1728,7 +1727,7 @@
           <a:p>
             <a:fld id="{E759A0DE-F190-5444-87AC-4719D5F20D15}" type="datetimeFigureOut">
               <a:rPr lang="en-US" smtClean="0"/>
-              <a:t>6/19/26</a:t>
+              <a:t>8/8/26</a:t>
             </a:fld>
             <a:endParaRPr lang="en-US"/>
           </a:p>
@@ -1823,7 +1822,7 @@
           <a:p>
             <a:fld id="{E759A0DE-F190-5444-87AC-4719D5F20D15}" type="datetimeFigureOut">
               <a:rPr lang="en-US" smtClean="0"/>
-              <a:t>6/19/26</a:t>
+              <a:t>8/8/26</a:t>
             </a:fld>
             <a:endParaRPr lang="en-US"/>
           </a:p>
@@ -2100,7 +2099,7 @@
           <a:p>
             <a:fld id="{E759A0DE-F190-5444-87AC-4719D5F20D15}" type="datetimeFigureOut">
               <a:rPr lang="en-US" smtClean="0"/>
-              <a:t>6/19/26</a:t>
+              <a:t>8/8/26</a:t>
             </a:fld>
             <a:endParaRPr lang="en-US"/>
           </a:p>
@@ -2357,7 +2356,7 @@
           <a:p>
             <a:fld id="{E759A0DE-F190-5444-87AC-4719D5F20D15}" type="datetimeFigureOut">
               <a:rPr lang="en-US" smtClean="0"/>
-              <a:t>6/19/26</a:t>
+              <a:t>8/8/26</a:t>
             </a:fld>
             <a:endParaRPr lang="en-US"/>
           </a:p>
@@ -2570,7 +2569,7 @@
           <a:p>
             <a:fld id="{E759A0DE-F190-5444-87AC-4719D5F20D15}" type="datetimeFigureOut">
               <a:rPr lang="en-US" smtClean="0"/>
-              <a:t>6/19/26</a:t>
+              <a:t>8/8/26</a:t>
             </a:fld>
             <a:endParaRPr lang="en-US"/>
           </a:p>
@@ -3031,6 +3030,68 @@
           </a:p>
         </p:txBody>
       </p:sp>
+      <p:sp>
+        <p:nvSpPr>
+          <p:cNvPr id="2" name="TextBox 1">
+            <a:extLst>
+              <a:ext uri="{FF2B5EF4-FFF2-40B4-BE49-F238E27FC236}">
+                <a16:creationId xmlns:a16="http://schemas.microsoft.com/office/drawing/2014/main" id="{4494038C-B358-C883-5794-16FF7CD54AD5}"/>
+              </a:ext>
+            </a:extLst>
+          </p:cNvPr>
+          <p:cNvSpPr txBox="1"/>
+          <p:nvPr/>
+        </p:nvSpPr>
+        <p:spPr>
+          <a:xfrm>
+            <a:off x="168442" y="5444311"/>
+            <a:ext cx="8807115" cy="1200329"/>
+          </a:xfrm>
+          <a:prstGeom prst="rect">
+            <a:avLst/>
+          </a:prstGeom>
+          <a:noFill/>
+        </p:spPr>
+        <p:txBody>
+          <a:bodyPr wrap="square" rtlCol="0">
+            <a:spAutoFit/>
+          </a:bodyPr>
+          <a:lstStyle/>
+          <a:p>
+            <a:pPr algn="ctr"/>
+            <a:r>
+              <a:rPr lang="en-US" dirty="0">
+                <a:solidFill>
+                  <a:schemeClr val="bg1"/>
+                </a:solidFill>
+              </a:rPr>
+              <a:t>Words &amp; Musci Matt Boswell and Matt Papa in (2016)</a:t>
+            </a:r>
+          </a:p>
+          <a:p>
+            <a:pPr algn="ctr"/>
+            <a:r>
+              <a:rPr lang="en-US" dirty="0">
+                <a:solidFill>
+                  <a:schemeClr val="bg1"/>
+                </a:solidFill>
+              </a:rPr>
+              <a:t>© Messenger Hymns and Love Your Enemies Publishing (Administered by Music Services, Inc.)</a:t>
+            </a:r>
+          </a:p>
+          <a:p>
+            <a:pPr algn="ctr"/>
+            <a:r>
+              <a:rPr lang="en-US" dirty="0">
+                <a:solidFill>
+                  <a:schemeClr val="bg1"/>
+                </a:solidFill>
+              </a:rPr>
+              <a:t>CCLI License #137776</a:t>
+            </a:r>
+          </a:p>
+        </p:txBody>
+      </p:sp>
     </p:spTree>
     <p:extLst>
       <p:ext uri="{BB962C8B-B14F-4D97-AF65-F5344CB8AC3E}">
@@ -3186,196 +3247,6 @@
     <p:extLst>
       <p:ext uri="{BB962C8B-B14F-4D97-AF65-F5344CB8AC3E}">
         <p14:creationId xmlns:p14="http://schemas.microsoft.com/office/powerpoint/2010/main" val="2164526557"/>
-      </p:ext>
-    </p:extLst>
-  </p:cSld>
-  <p:clrMapOvr>
-    <a:masterClrMapping/>
-  </p:clrMapOvr>
-</p:sld>
-</file>
-
-<file path=ppt/slides/slide3.xml><?xml version="1.0" encoding="utf-8"?>
-<p:sld xmlns:a="http://schemas.openxmlformats.org/drawingml/2006/main" xmlns:r="http://schemas.openxmlformats.org/officeDocument/2006/relationships" xmlns:p="http://schemas.openxmlformats.org/presentationml/2006/main">
-  <p:cSld>
-    <p:bg>
-      <p:bgPr>
-        <a:solidFill>
-          <a:schemeClr val="tx1"/>
-        </a:solidFill>
-        <a:effectLst/>
-      </p:bgPr>
-    </p:bg>
-    <p:spTree>
-      <p:nvGrpSpPr>
-        <p:cNvPr id="1" name="">
-          <a:extLst>
-            <a:ext uri="{FF2B5EF4-FFF2-40B4-BE49-F238E27FC236}">
-              <a16:creationId xmlns:a16="http://schemas.microsoft.com/office/drawing/2014/main" id="{35BFBF6E-A800-A557-4607-B211D092B56C}"/>
-            </a:ext>
-          </a:extLst>
-        </p:cNvPr>
-        <p:cNvGrpSpPr/>
-        <p:nvPr/>
-      </p:nvGrpSpPr>
-      <p:grpSpPr>
-        <a:xfrm>
-          <a:off x="0" y="0"/>
-          <a:ext cx="0" cy="0"/>
-          <a:chOff x="0" y="0"/>
-          <a:chExt cx="0" cy="0"/>
-        </a:xfrm>
-      </p:grpSpPr>
-      <p:sp>
-        <p:nvSpPr>
-          <p:cNvPr id="3" name="Subtitle 2">
-            <a:extLst>
-              <a:ext uri="{FF2B5EF4-FFF2-40B4-BE49-F238E27FC236}">
-                <a16:creationId xmlns:a16="http://schemas.microsoft.com/office/drawing/2014/main" id="{9C31C481-F61F-FA71-2898-FC5F29B5D3D4}"/>
-              </a:ext>
-            </a:extLst>
-          </p:cNvPr>
-          <p:cNvSpPr>
-            <a:spLocks noGrp="1"/>
-          </p:cNvSpPr>
-          <p:nvPr>
-            <p:ph type="subTitle" idx="1"/>
-          </p:nvPr>
-        </p:nvSpPr>
-        <p:spPr>
-          <a:xfrm>
-            <a:off x="144379" y="228600"/>
-            <a:ext cx="8903369" cy="6431280"/>
-          </a:xfrm>
-        </p:spPr>
-        <p:txBody>
-          <a:bodyPr>
-            <a:noAutofit/>
-          </a:bodyPr>
-          <a:lstStyle/>
-          <a:p>
-            <a:endParaRPr lang="en-US" sz="4000" dirty="0">
-              <a:solidFill>
-                <a:schemeClr val="bg1"/>
-              </a:solidFill>
-              <a:latin typeface="Avenir Medium" panose="02000503020000020003" pitchFamily="2" charset="0"/>
-              <a:ea typeface="Bodoni Ornaments" pitchFamily="2" charset="0"/>
-            </a:endParaRPr>
-          </a:p>
-          <a:p>
-            <a:r>
-              <a:rPr lang="en-US" sz="4000" dirty="0">
-                <a:solidFill>
-                  <a:schemeClr val="bg1"/>
-                </a:solidFill>
-                <a:latin typeface="Avenir Medium" panose="02000503020000020003" pitchFamily="2" charset="0"/>
-                <a:ea typeface="Bodoni Ornaments" pitchFamily="2" charset="0"/>
-              </a:rPr>
-              <a:t>Take my love; my Lord, I pour </a:t>
-            </a:r>
-          </a:p>
-          <a:p>
-            <a:r>
-              <a:rPr lang="en-US" sz="4000" dirty="0">
-                <a:solidFill>
-                  <a:schemeClr val="bg1"/>
-                </a:solidFill>
-                <a:latin typeface="Avenir Medium" panose="02000503020000020003" pitchFamily="2" charset="0"/>
-                <a:ea typeface="Bodoni Ornaments" pitchFamily="2" charset="0"/>
-              </a:rPr>
-              <a:t>At Thy feet its treasure store.</a:t>
-            </a:r>
-          </a:p>
-          <a:p>
-            <a:r>
-              <a:rPr lang="en-US" sz="4000" dirty="0">
-                <a:solidFill>
-                  <a:schemeClr val="bg1"/>
-                </a:solidFill>
-                <a:latin typeface="Avenir Medium" panose="02000503020000020003" pitchFamily="2" charset="0"/>
-                <a:ea typeface="Bodoni Ornaments" pitchFamily="2" charset="0"/>
-              </a:rPr>
-              <a:t>Take myself, and I will be </a:t>
-            </a:r>
-          </a:p>
-          <a:p>
-            <a:r>
-              <a:rPr lang="en-US" sz="4000" dirty="0">
-                <a:solidFill>
-                  <a:schemeClr val="bg1"/>
-                </a:solidFill>
-                <a:latin typeface="Avenir Medium" panose="02000503020000020003" pitchFamily="2" charset="0"/>
-                <a:ea typeface="Bodoni Ornaments" pitchFamily="2" charset="0"/>
-              </a:rPr>
-              <a:t>Ever, only, all for Thee,</a:t>
-            </a:r>
-          </a:p>
-          <a:p>
-            <a:r>
-              <a:rPr lang="en-US" sz="4000" dirty="0">
-                <a:solidFill>
-                  <a:schemeClr val="bg1"/>
-                </a:solidFill>
-                <a:latin typeface="Avenir Medium" panose="02000503020000020003" pitchFamily="2" charset="0"/>
-                <a:ea typeface="Bodoni Ornaments" pitchFamily="2" charset="0"/>
-              </a:rPr>
-              <a:t>Ever, only, all for Thee.</a:t>
-            </a:r>
-          </a:p>
-          <a:p>
-            <a:endParaRPr lang="en-US" sz="4000" dirty="0">
-              <a:solidFill>
-                <a:schemeClr val="bg1"/>
-              </a:solidFill>
-              <a:latin typeface="Avenir Medium" panose="02000503020000020003" pitchFamily="2" charset="0"/>
-              <a:ea typeface="Bodoni Ornaments" pitchFamily="2" charset="0"/>
-            </a:endParaRPr>
-          </a:p>
-        </p:txBody>
-      </p:sp>
-      <p:sp>
-        <p:nvSpPr>
-          <p:cNvPr id="2" name="TextBox 1">
-            <a:extLst>
-              <a:ext uri="{FF2B5EF4-FFF2-40B4-BE49-F238E27FC236}">
-                <a16:creationId xmlns:a16="http://schemas.microsoft.com/office/drawing/2014/main" id="{5DE5347E-CB9A-43DD-8F01-CD210F411994}"/>
-              </a:ext>
-            </a:extLst>
-          </p:cNvPr>
-          <p:cNvSpPr txBox="1"/>
-          <p:nvPr/>
-        </p:nvSpPr>
-        <p:spPr>
-          <a:xfrm>
-            <a:off x="7390614" y="6488668"/>
-            <a:ext cx="1753386" cy="369332"/>
-          </a:xfrm>
-          <a:prstGeom prst="rect">
-            <a:avLst/>
-          </a:prstGeom>
-          <a:noFill/>
-        </p:spPr>
-        <p:txBody>
-          <a:bodyPr wrap="square" rtlCol="0">
-            <a:spAutoFit/>
-          </a:bodyPr>
-          <a:lstStyle/>
-          <a:p>
-            <a:r>
-              <a:rPr lang="en-US" dirty="0">
-                <a:solidFill>
-                  <a:schemeClr val="bg1"/>
-                </a:solidFill>
-              </a:rPr>
-              <a:t>CCLI#7102397</a:t>
-            </a:r>
-          </a:p>
-        </p:txBody>
-      </p:sp>
-    </p:spTree>
-    <p:extLst>
-      <p:ext uri="{BB962C8B-B14F-4D97-AF65-F5344CB8AC3E}">
-        <p14:creationId xmlns:p14="http://schemas.microsoft.com/office/powerpoint/2010/main" val="2718413055"/>
       </p:ext>
     </p:extLst>
   </p:cSld>
